--- a/rapports/septembre/Qonto_sept2026.pptx
+++ b/rapports/septembre/Qonto_sept2026.pptx
@@ -5779,7 +5779,7 @@
         <p:spPr>
           <a:xfrm>
             <a:off x="8296656" y="4389120"/>
-            <a:ext cx="2072640" cy="152400"/>
+            <a:ext cx="2225040" cy="152400"/>
           </a:xfrm>
           <a:prstGeom prst="rect">
             <a:avLst/>
@@ -5858,7 +5858,7 @@
         <p:spPr>
           <a:xfrm>
             <a:off x="8296656" y="4657344"/>
-            <a:ext cx="2072640" cy="152400"/>
+            <a:ext cx="2225040" cy="152400"/>
           </a:xfrm>
           <a:prstGeom prst="rect">
             <a:avLst/>
@@ -5937,7 +5937,7 @@
         <p:spPr>
           <a:xfrm>
             <a:off x="8296656" y="4925568"/>
-            <a:ext cx="2072640" cy="152400"/>
+            <a:ext cx="2225040" cy="152400"/>
           </a:xfrm>
           <a:prstGeom prst="rect">
             <a:avLst/>
@@ -6016,7 +6016,7 @@
         <p:spPr>
           <a:xfrm>
             <a:off x="8296656" y="5193792"/>
-            <a:ext cx="2072640" cy="152400"/>
+            <a:ext cx="2225040" cy="152400"/>
           </a:xfrm>
           <a:prstGeom prst="rect">
             <a:avLst/>
@@ -6095,7 +6095,7 @@
         <p:spPr>
           <a:xfrm>
             <a:off x="8296656" y="5462016"/>
-            <a:ext cx="2072640" cy="152400"/>
+            <a:ext cx="2225040" cy="152400"/>
           </a:xfrm>
           <a:prstGeom prst="rect">
             <a:avLst/>
@@ -6174,7 +6174,7 @@
         <p:spPr>
           <a:xfrm>
             <a:off x="8296656" y="5730240"/>
-            <a:ext cx="2072640" cy="152400"/>
+            <a:ext cx="2225040" cy="152400"/>
           </a:xfrm>
           <a:prstGeom prst="rect">
             <a:avLst/>

--- a/rapports/septembre/Qonto_sept2026.pptx
+++ b/rapports/septembre/Qonto_sept2026.pptx
@@ -5651,7 +5651,7 @@
                 </a:solidFill>
                 <a:latin typeface="Arial"/>
               </a:rPr>
-              <a:t>MARQUES CITÉES</a:t>
+              <a:t>CATÉGORIES DE PRODUITS</a:t>
             </a:r>
           </a:p>
         </p:txBody>
@@ -5686,7 +5686,7 @@
                 </a:solidFill>
                 <a:latin typeface="Arial"/>
               </a:rPr>
-              <a:t>Part de voix dans les messages utilisateurs</a:t>
+              <a:t>Répartition des requêtes</a:t>
             </a:r>
           </a:p>
         </p:txBody>
@@ -5800,7 +5800,7 @@
                 </a:solidFill>
                 <a:latin typeface="Arial"/>
               </a:rPr>
-              <a:t>Boursorama · 23 %</a:t>
+              <a:t>Ouverture de compte pro</a:t>
             </a:r>
           </a:p>
         </p:txBody>
@@ -5879,7 +5879,7 @@
                 </a:solidFill>
                 <a:latin typeface="Arial"/>
               </a:rPr>
-              <a:t>BNP Paribas · 14 %</a:t>
+              <a:t>Création d'entreprise · 22 %</a:t>
             </a:r>
           </a:p>
         </p:txBody>
@@ -5958,7 +5958,7 @@
                 </a:solidFill>
                 <a:latin typeface="Arial"/>
               </a:rPr>
-              <a:t>Revolut Business · 10 %</a:t>
+              <a:t>Cartes et paiements · 18 %</a:t>
             </a:r>
           </a:p>
         </p:txBody>
@@ -6031,13 +6031,13 @@
           <a:p>
             <a:pPr algn="l"/>
             <a:r>
-              <a:rPr sz="1000" b="0" i="0">
+              <a:rPr sz="800" b="0" i="0">
                 <a:solidFill>
                   <a:srgbClr val="111111"/>
                 </a:solidFill>
                 <a:latin typeface="Arial"/>
               </a:rPr>
-              <a:t>Crédit Agricole · 10 %</a:t>
+              <a:t>Comparaison des banques pro · 14 %</a:t>
             </a:r>
           </a:p>
         </p:txBody>
@@ -6116,7 +6116,7 @@
                 </a:solidFill>
                 <a:latin typeface="Arial"/>
               </a:rPr>
-              <a:t>Banque Populaire · 9 %</a:t>
+              <a:t>Comptabilité et facturation · 8 %</a:t>
             </a:r>
           </a:p>
         </p:txBody>
@@ -6195,7 +6195,7 @@
                 </a:solidFill>
                 <a:latin typeface="Arial"/>
               </a:rPr>
-              <a:t>Autres (dont Qonto 1,5 %) · 34 %</a:t>
+              <a:t>Frais et tarifs · 4 %</a:t>
             </a:r>
           </a:p>
         </p:txBody>
@@ -6209,7 +6209,7 @@
         <p:spPr>
           <a:xfrm>
             <a:off x="10564368" y="4450080"/>
-            <a:ext cx="475488" cy="308457"/>
+            <a:ext cx="475488" cy="455980"/>
           </a:xfrm>
           <a:prstGeom prst="rect">
             <a:avLst/>
@@ -6246,14 +6246,49 @@
       </p:sp>
       <p:sp>
         <p:nvSpPr>
-          <p:cNvPr id="81" name="Rectangle 80"/>
+          <p:cNvPr id="81" name="TextBox 80"/>
+          <p:cNvSpPr txBox="1"/>
+          <p:nvPr/>
+        </p:nvSpPr>
+        <p:spPr>
+          <a:xfrm>
+            <a:off x="10564368" y="4450080"/>
+            <a:ext cx="475488" cy="455980"/>
+          </a:xfrm>
+          <a:prstGeom prst="rect">
+            <a:avLst/>
+          </a:prstGeom>
+          <a:noFill/>
+        </p:spPr>
+        <p:txBody>
+          <a:bodyPr wrap="square" anchor="ctr" lIns="0" rIns="0" tIns="0" bIns="0">
+            <a:spAutoFit/>
+          </a:bodyPr>
+          <a:lstStyle/>
+          <a:p>
+            <a:pPr algn="ctr"/>
+            <a:r>
+              <a:rPr sz="1000" b="1" i="0">
+                <a:solidFill>
+                  <a:srgbClr val="FFFFFF"/>
+                </a:solidFill>
+                <a:latin typeface="Arial"/>
+              </a:rPr>
+              <a:t>34 %</a:t>
+            </a:r>
+          </a:p>
+        </p:txBody>
+      </p:sp>
+      <p:sp>
+        <p:nvSpPr>
+          <p:cNvPr id="82" name="Rectangle 81"/>
           <p:cNvSpPr/>
           <p:nvPr/>
         </p:nvSpPr>
         <p:spPr>
           <a:xfrm>
-            <a:off x="10564368" y="4758537"/>
-            <a:ext cx="475488" cy="187756"/>
+            <a:off x="10564368" y="4906060"/>
+            <a:ext cx="475488" cy="295046"/>
           </a:xfrm>
           <a:prstGeom prst="rect">
             <a:avLst/>
@@ -6290,14 +6325,14 @@
       </p:sp>
       <p:sp>
         <p:nvSpPr>
-          <p:cNvPr id="82" name="Rectangle 81"/>
+          <p:cNvPr id="83" name="Rectangle 82"/>
           <p:cNvSpPr/>
           <p:nvPr/>
         </p:nvSpPr>
         <p:spPr>
           <a:xfrm>
-            <a:off x="10564368" y="4946294"/>
-            <a:ext cx="475488" cy="134112"/>
+            <a:off x="10564368" y="5201107"/>
+            <a:ext cx="475488" cy="241401"/>
           </a:xfrm>
           <a:prstGeom prst="rect">
             <a:avLst/>
@@ -6334,14 +6369,14 @@
       </p:sp>
       <p:sp>
         <p:nvSpPr>
-          <p:cNvPr id="83" name="Rectangle 82"/>
+          <p:cNvPr id="84" name="Rectangle 83"/>
           <p:cNvSpPr/>
           <p:nvPr/>
         </p:nvSpPr>
         <p:spPr>
           <a:xfrm>
-            <a:off x="10564368" y="5080406"/>
-            <a:ext cx="475488" cy="134112"/>
+            <a:off x="10564368" y="5442508"/>
+            <a:ext cx="475488" cy="187756"/>
           </a:xfrm>
           <a:prstGeom prst="rect">
             <a:avLst/>
@@ -6378,14 +6413,14 @@
       </p:sp>
       <p:sp>
         <p:nvSpPr>
-          <p:cNvPr id="84" name="Rectangle 83"/>
+          <p:cNvPr id="85" name="Rectangle 84"/>
           <p:cNvSpPr/>
           <p:nvPr/>
         </p:nvSpPr>
         <p:spPr>
           <a:xfrm>
-            <a:off x="10564368" y="5214518"/>
-            <a:ext cx="475488" cy="120700"/>
+            <a:off x="10564368" y="5630265"/>
+            <a:ext cx="475488" cy="107289"/>
           </a:xfrm>
           <a:prstGeom prst="rect">
             <a:avLst/>
@@ -6422,14 +6457,14 @@
       </p:sp>
       <p:sp>
         <p:nvSpPr>
-          <p:cNvPr id="85" name="Rectangle 84"/>
+          <p:cNvPr id="86" name="Rectangle 85"/>
           <p:cNvSpPr/>
           <p:nvPr/>
         </p:nvSpPr>
         <p:spPr>
           <a:xfrm>
-            <a:off x="10564368" y="5335219"/>
-            <a:ext cx="475488" cy="455980"/>
+            <a:off x="10564368" y="5737555"/>
+            <a:ext cx="475488" cy="53644"/>
           </a:xfrm>
           <a:prstGeom prst="rect">
             <a:avLst/>
@@ -6461,41 +6496,6 @@
           <a:lstStyle/>
           <a:p>
             <a:pPr algn="ctr"/>
-          </a:p>
-        </p:txBody>
-      </p:sp>
-      <p:sp>
-        <p:nvSpPr>
-          <p:cNvPr id="86" name="TextBox 85"/>
-          <p:cNvSpPr txBox="1"/>
-          <p:nvPr/>
-        </p:nvSpPr>
-        <p:spPr>
-          <a:xfrm>
-            <a:off x="10564368" y="5335219"/>
-            <a:ext cx="475488" cy="455980"/>
-          </a:xfrm>
-          <a:prstGeom prst="rect">
-            <a:avLst/>
-          </a:prstGeom>
-          <a:noFill/>
-        </p:spPr>
-        <p:txBody>
-          <a:bodyPr wrap="square" anchor="ctr" lIns="0" rIns="0" tIns="0" bIns="0">
-            <a:spAutoFit/>
-          </a:bodyPr>
-          <a:lstStyle/>
-          <a:p>
-            <a:pPr algn="ctr"/>
-            <a:r>
-              <a:rPr sz="1000" b="1" i="0">
-                <a:solidFill>
-                  <a:srgbClr val="FFFFFF"/>
-                </a:solidFill>
-                <a:latin typeface="Arial"/>
-              </a:rPr>
-              <a:t>34 %</a:t>
-            </a:r>
           </a:p>
         </p:txBody>
       </p:sp>

--- a/rapports/septembre/Qonto_sept2026.pptx
+++ b/rapports/septembre/Qonto_sept2026.pptx
@@ -5800,7 +5800,7 @@
                 </a:solidFill>
                 <a:latin typeface="Arial"/>
               </a:rPr>
-              <a:t>Ouverture de compte pro</a:t>
+              <a:t>Compte pro</a:t>
             </a:r>
           </a:p>
         </p:txBody>
@@ -5879,7 +5879,7 @@
                 </a:solidFill>
                 <a:latin typeface="Arial"/>
               </a:rPr>
-              <a:t>Création d'entreprise · 22 %</a:t>
+              <a:t>Création d'entreprise · 30 %</a:t>
             </a:r>
           </a:p>
         </p:txBody>
@@ -5958,7 +5958,7 @@
                 </a:solidFill>
                 <a:latin typeface="Arial"/>
               </a:rPr>
-              <a:t>Cartes et paiements · 18 %</a:t>
+              <a:t>Facturation · 29 %</a:t>
             </a:r>
           </a:p>
         </p:txBody>
@@ -5971,245 +5971,8 @@
         </p:nvSpPr>
         <p:spPr>
           <a:xfrm>
-            <a:off x="8077200" y="5212080"/>
-            <a:ext cx="121920" cy="121920"/>
-          </a:xfrm>
-          <a:prstGeom prst="rect">
-            <a:avLst/>
-          </a:prstGeom>
-          <a:solidFill>
-            <a:srgbClr val="EE6A2C"/>
-          </a:solidFill>
-          <a:ln>
-            <a:noFill/>
-          </a:ln>
-          <a:effectLst/>
-        </p:spPr>
-        <p:style>
-          <a:lnRef idx="1">
-            <a:schemeClr val="accent1"/>
-          </a:lnRef>
-          <a:fillRef idx="3">
-            <a:schemeClr val="accent1"/>
-          </a:fillRef>
-          <a:effectRef idx="2">
-            <a:schemeClr val="accent1"/>
-          </a:effectRef>
-          <a:fontRef idx="minor">
-            <a:schemeClr val="lt1"/>
-          </a:fontRef>
-        </p:style>
-        <p:txBody>
-          <a:bodyPr rtlCol="0" anchor="ctr"/>
-          <a:lstStyle/>
-          <a:p>
-            <a:pPr algn="ctr"/>
-          </a:p>
-        </p:txBody>
-      </p:sp>
-      <p:sp>
-        <p:nvSpPr>
-          <p:cNvPr id="75" name="TextBox 74"/>
-          <p:cNvSpPr txBox="1"/>
-          <p:nvPr/>
-        </p:nvSpPr>
-        <p:spPr>
-          <a:xfrm>
-            <a:off x="8296656" y="5193792"/>
-            <a:ext cx="2225040" cy="152400"/>
-          </a:xfrm>
-          <a:prstGeom prst="rect">
-            <a:avLst/>
-          </a:prstGeom>
-          <a:noFill/>
-        </p:spPr>
-        <p:txBody>
-          <a:bodyPr wrap="square" anchor="t" lIns="0" rIns="0" tIns="0" bIns="0">
-            <a:spAutoFit/>
-          </a:bodyPr>
-          <a:lstStyle/>
-          <a:p>
-            <a:pPr algn="l"/>
-            <a:r>
-              <a:rPr sz="800" b="0" i="0">
-                <a:solidFill>
-                  <a:srgbClr val="111111"/>
-                </a:solidFill>
-                <a:latin typeface="Arial"/>
-              </a:rPr>
-              <a:t>Comparaison des banques pro · 14 %</a:t>
-            </a:r>
-          </a:p>
-        </p:txBody>
-      </p:sp>
-      <p:sp>
-        <p:nvSpPr>
-          <p:cNvPr id="76" name="Rectangle 75"/>
-          <p:cNvSpPr/>
-          <p:nvPr/>
-        </p:nvSpPr>
-        <p:spPr>
-          <a:xfrm>
-            <a:off x="8077200" y="5480304"/>
-            <a:ext cx="121920" cy="121920"/>
-          </a:xfrm>
-          <a:prstGeom prst="rect">
-            <a:avLst/>
-          </a:prstGeom>
-          <a:solidFill>
-            <a:srgbClr val="3E5A78"/>
-          </a:solidFill>
-          <a:ln>
-            <a:noFill/>
-          </a:ln>
-          <a:effectLst/>
-        </p:spPr>
-        <p:style>
-          <a:lnRef idx="1">
-            <a:schemeClr val="accent1"/>
-          </a:lnRef>
-          <a:fillRef idx="3">
-            <a:schemeClr val="accent1"/>
-          </a:fillRef>
-          <a:effectRef idx="2">
-            <a:schemeClr val="accent1"/>
-          </a:effectRef>
-          <a:fontRef idx="minor">
-            <a:schemeClr val="lt1"/>
-          </a:fontRef>
-        </p:style>
-        <p:txBody>
-          <a:bodyPr rtlCol="0" anchor="ctr"/>
-          <a:lstStyle/>
-          <a:p>
-            <a:pPr algn="ctr"/>
-          </a:p>
-        </p:txBody>
-      </p:sp>
-      <p:sp>
-        <p:nvSpPr>
-          <p:cNvPr id="77" name="TextBox 76"/>
-          <p:cNvSpPr txBox="1"/>
-          <p:nvPr/>
-        </p:nvSpPr>
-        <p:spPr>
-          <a:xfrm>
-            <a:off x="8296656" y="5462016"/>
-            <a:ext cx="2225040" cy="152400"/>
-          </a:xfrm>
-          <a:prstGeom prst="rect">
-            <a:avLst/>
-          </a:prstGeom>
-          <a:noFill/>
-        </p:spPr>
-        <p:txBody>
-          <a:bodyPr wrap="square" anchor="t" lIns="0" rIns="0" tIns="0" bIns="0">
-            <a:spAutoFit/>
-          </a:bodyPr>
-          <a:lstStyle/>
-          <a:p>
-            <a:pPr algn="l"/>
-            <a:r>
-              <a:rPr sz="1000" b="0" i="0">
-                <a:solidFill>
-                  <a:srgbClr val="111111"/>
-                </a:solidFill>
-                <a:latin typeface="Arial"/>
-              </a:rPr>
-              <a:t>Comptabilité et facturation · 8 %</a:t>
-            </a:r>
-          </a:p>
-        </p:txBody>
-      </p:sp>
-      <p:sp>
-        <p:nvSpPr>
-          <p:cNvPr id="78" name="Rectangle 77"/>
-          <p:cNvSpPr/>
-          <p:nvPr/>
-        </p:nvSpPr>
-        <p:spPr>
-          <a:xfrm>
-            <a:off x="8077200" y="5748528"/>
-            <a:ext cx="121920" cy="121920"/>
-          </a:xfrm>
-          <a:prstGeom prst="rect">
-            <a:avLst/>
-          </a:prstGeom>
-          <a:solidFill>
-            <a:srgbClr val="A09278"/>
-          </a:solidFill>
-          <a:ln>
-            <a:noFill/>
-          </a:ln>
-          <a:effectLst/>
-        </p:spPr>
-        <p:style>
-          <a:lnRef idx="1">
-            <a:schemeClr val="accent1"/>
-          </a:lnRef>
-          <a:fillRef idx="3">
-            <a:schemeClr val="accent1"/>
-          </a:fillRef>
-          <a:effectRef idx="2">
-            <a:schemeClr val="accent1"/>
-          </a:effectRef>
-          <a:fontRef idx="minor">
-            <a:schemeClr val="lt1"/>
-          </a:fontRef>
-        </p:style>
-        <p:txBody>
-          <a:bodyPr rtlCol="0" anchor="ctr"/>
-          <a:lstStyle/>
-          <a:p>
-            <a:pPr algn="ctr"/>
-          </a:p>
-        </p:txBody>
-      </p:sp>
-      <p:sp>
-        <p:nvSpPr>
-          <p:cNvPr id="79" name="TextBox 78"/>
-          <p:cNvSpPr txBox="1"/>
-          <p:nvPr/>
-        </p:nvSpPr>
-        <p:spPr>
-          <a:xfrm>
-            <a:off x="8296656" y="5730240"/>
-            <a:ext cx="2225040" cy="152400"/>
-          </a:xfrm>
-          <a:prstGeom prst="rect">
-            <a:avLst/>
-          </a:prstGeom>
-          <a:noFill/>
-        </p:spPr>
-        <p:txBody>
-          <a:bodyPr wrap="square" anchor="t" lIns="0" rIns="0" tIns="0" bIns="0">
-            <a:spAutoFit/>
-          </a:bodyPr>
-          <a:lstStyle/>
-          <a:p>
-            <a:pPr algn="l"/>
-            <a:r>
-              <a:rPr sz="1000" b="0" i="0">
-                <a:solidFill>
-                  <a:srgbClr val="111111"/>
-                </a:solidFill>
-                <a:latin typeface="Arial"/>
-              </a:rPr>
-              <a:t>Frais et tarifs · 4 %</a:t>
-            </a:r>
-          </a:p>
-        </p:txBody>
-      </p:sp>
-      <p:sp>
-        <p:nvSpPr>
-          <p:cNvPr id="80" name="Rectangle 79"/>
-          <p:cNvSpPr/>
-          <p:nvPr/>
-        </p:nvSpPr>
-        <p:spPr>
-          <a:xfrm>
             <a:off x="10564368" y="4450080"/>
-            <a:ext cx="475488" cy="455980"/>
+            <a:ext cx="475488" cy="549859"/>
           </a:xfrm>
           <a:prstGeom prst="rect">
             <a:avLst/>
@@ -6246,14 +6009,14 @@
       </p:sp>
       <p:sp>
         <p:nvSpPr>
-          <p:cNvPr id="81" name="TextBox 80"/>
+          <p:cNvPr id="75" name="TextBox 74"/>
           <p:cNvSpPr txBox="1"/>
           <p:nvPr/>
         </p:nvSpPr>
         <p:spPr>
           <a:xfrm>
             <a:off x="10564368" y="4450080"/>
-            <a:ext cx="475488" cy="455980"/>
+            <a:ext cx="475488" cy="549859"/>
           </a:xfrm>
           <a:prstGeom prst="rect">
             <a:avLst/>
@@ -6274,21 +6037,21 @@
                 </a:solidFill>
                 <a:latin typeface="Arial"/>
               </a:rPr>
-              <a:t>34 %</a:t>
-            </a:r>
-          </a:p>
-        </p:txBody>
-      </p:sp>
-      <p:sp>
-        <p:nvSpPr>
-          <p:cNvPr id="82" name="Rectangle 81"/>
+              <a:t>41 %</a:t>
+            </a:r>
+          </a:p>
+        </p:txBody>
+      </p:sp>
+      <p:sp>
+        <p:nvSpPr>
+          <p:cNvPr id="76" name="Rectangle 75"/>
           <p:cNvSpPr/>
           <p:nvPr/>
         </p:nvSpPr>
         <p:spPr>
           <a:xfrm>
-            <a:off x="10564368" y="4906060"/>
-            <a:ext cx="475488" cy="295046"/>
+            <a:off x="10564368" y="4999939"/>
+            <a:ext cx="475488" cy="402336"/>
           </a:xfrm>
           <a:prstGeom prst="rect">
             <a:avLst/>
@@ -6325,14 +6088,49 @@
       </p:sp>
       <p:sp>
         <p:nvSpPr>
-          <p:cNvPr id="83" name="Rectangle 82"/>
+          <p:cNvPr id="77" name="TextBox 76"/>
+          <p:cNvSpPr txBox="1"/>
+          <p:nvPr/>
+        </p:nvSpPr>
+        <p:spPr>
+          <a:xfrm>
+            <a:off x="10564368" y="4999939"/>
+            <a:ext cx="475488" cy="402336"/>
+          </a:xfrm>
+          <a:prstGeom prst="rect">
+            <a:avLst/>
+          </a:prstGeom>
+          <a:noFill/>
+        </p:spPr>
+        <p:txBody>
+          <a:bodyPr wrap="square" anchor="ctr" lIns="0" rIns="0" tIns="0" bIns="0">
+            <a:spAutoFit/>
+          </a:bodyPr>
+          <a:lstStyle/>
+          <a:p>
+            <a:pPr algn="ctr"/>
+            <a:r>
+              <a:rPr sz="1000" b="1" i="0">
+                <a:solidFill>
+                  <a:srgbClr val="FFFFFF"/>
+                </a:solidFill>
+                <a:latin typeface="Arial"/>
+              </a:rPr>
+              <a:t>30 %</a:t>
+            </a:r>
+          </a:p>
+        </p:txBody>
+      </p:sp>
+      <p:sp>
+        <p:nvSpPr>
+          <p:cNvPr id="78" name="Rectangle 77"/>
           <p:cNvSpPr/>
           <p:nvPr/>
         </p:nvSpPr>
         <p:spPr>
           <a:xfrm>
-            <a:off x="10564368" y="5201107"/>
-            <a:ext cx="475488" cy="241401"/>
+            <a:off x="10564368" y="5402275"/>
+            <a:ext cx="475488" cy="388924"/>
           </a:xfrm>
           <a:prstGeom prst="rect">
             <a:avLst/>
@@ -6369,133 +6167,36 @@
       </p:sp>
       <p:sp>
         <p:nvSpPr>
-          <p:cNvPr id="84" name="Rectangle 83"/>
-          <p:cNvSpPr/>
-          <p:nvPr/>
-        </p:nvSpPr>
-        <p:spPr>
-          <a:xfrm>
-            <a:off x="10564368" y="5442508"/>
-            <a:ext cx="475488" cy="187756"/>
-          </a:xfrm>
-          <a:prstGeom prst="rect">
-            <a:avLst/>
-          </a:prstGeom>
-          <a:solidFill>
-            <a:srgbClr val="EE6A2C"/>
-          </a:solidFill>
-          <a:ln>
-            <a:noFill/>
-          </a:ln>
-          <a:effectLst/>
-        </p:spPr>
-        <p:style>
-          <a:lnRef idx="1">
-            <a:schemeClr val="accent1"/>
-          </a:lnRef>
-          <a:fillRef idx="3">
-            <a:schemeClr val="accent1"/>
-          </a:fillRef>
-          <a:effectRef idx="2">
-            <a:schemeClr val="accent1"/>
-          </a:effectRef>
-          <a:fontRef idx="minor">
-            <a:schemeClr val="lt1"/>
-          </a:fontRef>
-        </p:style>
-        <p:txBody>
-          <a:bodyPr rtlCol="0" anchor="ctr"/>
+          <p:cNvPr id="79" name="TextBox 78"/>
+          <p:cNvSpPr txBox="1"/>
+          <p:nvPr/>
+        </p:nvSpPr>
+        <p:spPr>
+          <a:xfrm>
+            <a:off x="10564368" y="5402275"/>
+            <a:ext cx="475488" cy="388924"/>
+          </a:xfrm>
+          <a:prstGeom prst="rect">
+            <a:avLst/>
+          </a:prstGeom>
+          <a:noFill/>
+        </p:spPr>
+        <p:txBody>
+          <a:bodyPr wrap="square" anchor="ctr" lIns="0" rIns="0" tIns="0" bIns="0">
+            <a:spAutoFit/>
+          </a:bodyPr>
           <a:lstStyle/>
           <a:p>
             <a:pPr algn="ctr"/>
-          </a:p>
-        </p:txBody>
-      </p:sp>
-      <p:sp>
-        <p:nvSpPr>
-          <p:cNvPr id="85" name="Rectangle 84"/>
-          <p:cNvSpPr/>
-          <p:nvPr/>
-        </p:nvSpPr>
-        <p:spPr>
-          <a:xfrm>
-            <a:off x="10564368" y="5630265"/>
-            <a:ext cx="475488" cy="107289"/>
-          </a:xfrm>
-          <a:prstGeom prst="rect">
-            <a:avLst/>
-          </a:prstGeom>
-          <a:solidFill>
-            <a:srgbClr val="3E5A78"/>
-          </a:solidFill>
-          <a:ln>
-            <a:noFill/>
-          </a:ln>
-          <a:effectLst/>
-        </p:spPr>
-        <p:style>
-          <a:lnRef idx="1">
-            <a:schemeClr val="accent1"/>
-          </a:lnRef>
-          <a:fillRef idx="3">
-            <a:schemeClr val="accent1"/>
-          </a:fillRef>
-          <a:effectRef idx="2">
-            <a:schemeClr val="accent1"/>
-          </a:effectRef>
-          <a:fontRef idx="minor">
-            <a:schemeClr val="lt1"/>
-          </a:fontRef>
-        </p:style>
-        <p:txBody>
-          <a:bodyPr rtlCol="0" anchor="ctr"/>
-          <a:lstStyle/>
-          <a:p>
-            <a:pPr algn="ctr"/>
-          </a:p>
-        </p:txBody>
-      </p:sp>
-      <p:sp>
-        <p:nvSpPr>
-          <p:cNvPr id="86" name="Rectangle 85"/>
-          <p:cNvSpPr/>
-          <p:nvPr/>
-        </p:nvSpPr>
-        <p:spPr>
-          <a:xfrm>
-            <a:off x="10564368" y="5737555"/>
-            <a:ext cx="475488" cy="53644"/>
-          </a:xfrm>
-          <a:prstGeom prst="rect">
-            <a:avLst/>
-          </a:prstGeom>
-          <a:solidFill>
-            <a:srgbClr val="A09278"/>
-          </a:solidFill>
-          <a:ln>
-            <a:noFill/>
-          </a:ln>
-          <a:effectLst/>
-        </p:spPr>
-        <p:style>
-          <a:lnRef idx="1">
-            <a:schemeClr val="accent1"/>
-          </a:lnRef>
-          <a:fillRef idx="3">
-            <a:schemeClr val="accent1"/>
-          </a:fillRef>
-          <a:effectRef idx="2">
-            <a:schemeClr val="accent1"/>
-          </a:effectRef>
-          <a:fontRef idx="minor">
-            <a:schemeClr val="lt1"/>
-          </a:fontRef>
-        </p:style>
-        <p:txBody>
-          <a:bodyPr rtlCol="0" anchor="ctr"/>
-          <a:lstStyle/>
-          <a:p>
-            <a:pPr algn="ctr"/>
+            <a:r>
+              <a:rPr sz="1000" b="1" i="0">
+                <a:solidFill>
+                  <a:srgbClr val="FFFFFF"/>
+                </a:solidFill>
+                <a:latin typeface="Arial"/>
+              </a:rPr>
+              <a:t>29 %</a:t>
+            </a:r>
           </a:p>
         </p:txBody>
       </p:sp>
@@ -6900,7 +6601,7 @@
                 </a:solidFill>
                 <a:latin typeface="Arial"/>
               </a:rPr>
-              <a:t>Cibler la création d'entreprise</a:t>
+              <a:t>La facturation clique le plus</a:t>
             </a:r>
           </a:p>
         </p:txBody>
@@ -6935,7 +6636,7 @@
                 </a:solidFill>
                 <a:latin typeface="Arial"/>
               </a:rPr>
-              <a:t>La création d'entreprise déclenche 15,1 % des conversations du secteur, un moment clé pour ouvrir un compte pro.</a:t>
+              <a:t>L'annonce « Logiciel de facturation gratuit » atteint 1,13 fois le CTR moyen.</a:t>
             </a:r>
           </a:p>
         </p:txBody>
@@ -6970,7 +6671,7 @@
                 </a:solidFill>
                 <a:latin typeface="Arial"/>
               </a:rPr>
-              <a:t>→  Construire les accroches autour du lancement : « Ouvrez votre compte pro en quelques minutes ».</a:t>
+              <a:t>→  Mettre en avant la facturation électronique, à l'approche de la réforme.</a:t>
             </a:r>
           </a:p>
         </p:txBody>
@@ -7086,7 +6787,7 @@
                 </a:solidFill>
                 <a:latin typeface="Arial"/>
               </a:rPr>
-              <a:t>Être présent après une perte ou un vol de carte</a:t>
+              <a:t>La création d'entreprise fonctionne bien</a:t>
             </a:r>
           </a:p>
         </p:txBody>
@@ -7121,7 +6822,7 @@
                 </a:solidFill>
                 <a:latin typeface="Arial"/>
               </a:rPr>
-              <a:t>Le remplacement après perte (19,2 %) et le vol de portefeuille (5,4 %) déclenchent près d'un quart des conversations.</a:t>
+              <a:t>L'annonce création d'entreprise atteint 1,06 fois la moyenne.</a:t>
             </a:r>
           </a:p>
         </p:txBody>
@@ -7156,7 +6857,7 @@
                 </a:solidFill>
                 <a:latin typeface="Arial"/>
               </a:rPr>
-              <a:t>→  Mettre en avant la gestion des cartes depuis l'appli (blocage, carte virtuelle).</a:t>
+              <a:t>→  Cibler les moments de création (statuts, dépôt de capital, immatriculation).</a:t>
             </a:r>
           </a:p>
         </p:txBody>
@@ -7272,7 +6973,7 @@
                 </a:solidFill>
                 <a:latin typeface="Arial"/>
               </a:rPr>
-              <a:t>Une forte présence ads, peu de recommandation spontanée</a:t>
+              <a:t>Revoir l'annonce compte pro</a:t>
             </a:r>
           </a:p>
         </p:txBody>
@@ -7307,7 +7008,7 @@
                 </a:solidFill>
                 <a:latin typeface="Arial"/>
               </a:rPr>
-              <a:t>Qonto pèse 47,8 % de part de voix ads (+45,6 pts) et 1,5 % de part de voix (+0,8 pt). Les IA citent spontanément Shine (18,3 %) et Revolut Business (14,4 %), mais Qonto dans moins de 0,1 % des cas.</a:t>
+              <a:t>Le compte pro représente 41 % de la diffusion mais reste à 0,86 fois la moyenne.</a:t>
             </a:r>
           </a:p>
         </p:txBody>
@@ -7342,7 +7043,7 @@
                 </a:solidFill>
                 <a:latin typeface="Arial"/>
               </a:rPr>
-              <a:t>→  Enrichir les contenus de marque (comparatifs, guides de création) pour être recommandé sans être nommé.</a:t>
+              <a:t>→  Tester une accroche plus concrète (ouverture en quelques minutes, cartes, virements instantanés).</a:t>
             </a:r>
           </a:p>
         </p:txBody>
@@ -7493,7 +7194,7 @@
                 </a:solidFill>
                 <a:latin typeface="Arial"/>
               </a:rPr>
-              <a:t>Lancée le 03/09, la campagne génère 1 094 021 impressions et 4 757 clics, pour un CTR de 0,43 %.</a:t>
+              <a:t>Lancée le 03/09, la campagne génère 4 757 clics pour un CTR de 0,43 %.</a:t>
             </a:r>
           </a:p>
         </p:txBody>
@@ -7528,7 +7229,7 @@
                 </a:solidFill>
                 <a:latin typeface="Arial"/>
               </a:rPr>
-              <a:t>→  Mesurer les ouvertures de compte pour piloter la campagne au coût par acquisition.</a:t>
+              <a:t>→  Mesurer les ouvertures de compte pour piloter la campagne.</a:t>
             </a:r>
           </a:p>
         </p:txBody>
